--- a/Pitch/BeReal Passport And Community Boards Pitch.pptx
+++ b/Pitch/BeReal Passport And Community Boards Pitch.pptx
@@ -6117,7 +6117,7 @@
         </p:nvSpPr>
         <p:spPr>
           <a:xfrm>
-            <a:off x="981299" y="6387901"/>
+            <a:off x="930498" y="6210029"/>
             <a:ext cx="3151335" cy="177872"/>
           </a:xfrm>
           <a:prstGeom prst="rect">
@@ -6147,6 +6147,83 @@
                 <a:cs typeface="DM Sans" pitchFamily="34" charset="-120"/>
               </a:rPr>
               <a:t>Lashawn Fofung, MBA, CSM, CSPO</a:t>
+            </a:r>
+            <a:endParaRPr lang="en-US" sz="900" dirty="0">
+              <a:solidFill>
+                <a:schemeClr val="bg1"/>
+              </a:solidFill>
+            </a:endParaRPr>
+          </a:p>
+        </p:txBody>
+      </p:sp>
+      <p:sp>
+        <p:nvSpPr>
+          <p:cNvPr id="16" name="Text 13">
+            <a:extLst>
+              <a:ext uri="{FF2B5EF4-FFF2-40B4-BE49-F238E27FC236}">
+                <a16:creationId xmlns:a16="http://schemas.microsoft.com/office/drawing/2014/main" id="{CE8F2C69-5CA9-9659-1D49-0A32D9E16110}"/>
+              </a:ext>
+            </a:extLst>
+          </p:cNvPr>
+          <p:cNvSpPr/>
+          <p:nvPr/>
+        </p:nvSpPr>
+        <p:spPr>
+          <a:xfrm>
+            <a:off x="524099" y="6488503"/>
+            <a:ext cx="4896987" cy="177872"/>
+          </a:xfrm>
+          <a:prstGeom prst="rect">
+            <a:avLst/>
+          </a:prstGeom>
+          <a:noFill/>
+          <a:ln/>
+        </p:spPr>
+        <p:txBody>
+          <a:bodyPr wrap="square" lIns="0" tIns="0" rIns="0" bIns="0" rtlCol="0" anchor="t">
+            <a:noAutofit/>
+          </a:bodyPr>
+          <a:lstStyle/>
+          <a:p>
+            <a:pPr algn="ctr">
+              <a:lnSpc>
+                <a:spcPts val="1680"/>
+              </a:lnSpc>
+            </a:pPr>
+            <a:r>
+              <a:rPr lang="en-US" sz="900" dirty="0">
+                <a:solidFill>
+                  <a:schemeClr val="bg1"/>
+                </a:solidFill>
+                <a:latin typeface="DM Sans" pitchFamily="34" charset="0"/>
+                <a:ea typeface="DM Sans" pitchFamily="34" charset="-122"/>
+                <a:cs typeface="DM Sans" pitchFamily="34" charset="-120"/>
+              </a:rPr>
+              <a:t>Full Case Study:  </a:t>
+            </a:r>
+            <a:r>
+              <a:rPr lang="en-US" sz="900" dirty="0">
+                <a:solidFill>
+                  <a:schemeClr val="bg1"/>
+                </a:solidFill>
+                <a:latin typeface="DM Sans" pitchFamily="34" charset="0"/>
+                <a:ea typeface="DM Sans" pitchFamily="34" charset="-122"/>
+                <a:cs typeface="DM Sans" pitchFamily="34" charset="-120"/>
+                <a:hlinkClick r:id="rId3"/>
+              </a:rPr>
+              <a:t>BeReal Case Study – Real Passport And Community </a:t>
+            </a:r>
+            <a:r>
+              <a:rPr lang="en-US" sz="900" dirty="0" err="1">
+                <a:solidFill>
+                  <a:schemeClr val="bg1"/>
+                </a:solidFill>
+                <a:latin typeface="DM Sans" pitchFamily="34" charset="0"/>
+                <a:ea typeface="DM Sans" pitchFamily="34" charset="-122"/>
+                <a:cs typeface="DM Sans" pitchFamily="34" charset="-120"/>
+                <a:hlinkClick r:id="rId3"/>
+              </a:rPr>
+              <a:t>Boards.pdf</a:t>
             </a:r>
             <a:endParaRPr lang="en-US" sz="900" dirty="0">
               <a:solidFill>
